--- a/ゲーム科2年/00_前期/ゲームエンジンⅢ/バージョン管理/09_ここまでの課題.pptx
+++ b/ゲーム科2年/00_前期/ゲームエンジンⅢ/バージョン管理/09_ここまでの課題.pptx
@@ -263,7 +263,7 @@
           <a:p>
             <a:fld id="{E9CC885B-4903-4D54-9A93-00025F12DED9}" type="datetimeFigureOut">
               <a:rPr kumimoji="1" lang="ja-JP" altLang="en-US" smtClean="0"/>
-              <a:t>2025/1/16</a:t>
+              <a:t>2025/1/17</a:t>
             </a:fld>
             <a:endParaRPr kumimoji="1" lang="ja-JP" altLang="en-US"/>
           </a:p>
@@ -493,7 +493,7 @@
           <a:p>
             <a:fld id="{E9CC885B-4903-4D54-9A93-00025F12DED9}" type="datetimeFigureOut">
               <a:rPr kumimoji="1" lang="ja-JP" altLang="en-US" smtClean="0"/>
-              <a:t>2025/1/16</a:t>
+              <a:t>2025/1/17</a:t>
             </a:fld>
             <a:endParaRPr kumimoji="1" lang="ja-JP" altLang="en-US"/>
           </a:p>
@@ -733,7 +733,7 @@
           <a:p>
             <a:fld id="{E9CC885B-4903-4D54-9A93-00025F12DED9}" type="datetimeFigureOut">
               <a:rPr kumimoji="1" lang="ja-JP" altLang="en-US" smtClean="0"/>
-              <a:t>2025/1/16</a:t>
+              <a:t>2025/1/17</a:t>
             </a:fld>
             <a:endParaRPr kumimoji="1" lang="ja-JP" altLang="en-US"/>
           </a:p>
@@ -963,7 +963,7 @@
           <a:p>
             <a:fld id="{E9CC885B-4903-4D54-9A93-00025F12DED9}" type="datetimeFigureOut">
               <a:rPr kumimoji="1" lang="ja-JP" altLang="en-US" smtClean="0"/>
-              <a:t>2025/1/16</a:t>
+              <a:t>2025/1/17</a:t>
             </a:fld>
             <a:endParaRPr kumimoji="1" lang="ja-JP" altLang="en-US"/>
           </a:p>
@@ -1238,7 +1238,7 @@
           <a:p>
             <a:fld id="{E9CC885B-4903-4D54-9A93-00025F12DED9}" type="datetimeFigureOut">
               <a:rPr kumimoji="1" lang="ja-JP" altLang="en-US" smtClean="0"/>
-              <a:t>2025/1/16</a:t>
+              <a:t>2025/1/17</a:t>
             </a:fld>
             <a:endParaRPr kumimoji="1" lang="ja-JP" altLang="en-US"/>
           </a:p>
@@ -1567,7 +1567,7 @@
           <a:p>
             <a:fld id="{E9CC885B-4903-4D54-9A93-00025F12DED9}" type="datetimeFigureOut">
               <a:rPr kumimoji="1" lang="ja-JP" altLang="en-US" smtClean="0"/>
-              <a:t>2025/1/16</a:t>
+              <a:t>2025/1/17</a:t>
             </a:fld>
             <a:endParaRPr kumimoji="1" lang="ja-JP" altLang="en-US"/>
           </a:p>
@@ -2043,7 +2043,7 @@
           <a:p>
             <a:fld id="{E9CC885B-4903-4D54-9A93-00025F12DED9}" type="datetimeFigureOut">
               <a:rPr kumimoji="1" lang="ja-JP" altLang="en-US" smtClean="0"/>
-              <a:t>2025/1/16</a:t>
+              <a:t>2025/1/17</a:t>
             </a:fld>
             <a:endParaRPr kumimoji="1" lang="ja-JP" altLang="en-US"/>
           </a:p>
@@ -2184,7 +2184,7 @@
           <a:p>
             <a:fld id="{E9CC885B-4903-4D54-9A93-00025F12DED9}" type="datetimeFigureOut">
               <a:rPr kumimoji="1" lang="ja-JP" altLang="en-US" smtClean="0"/>
-              <a:t>2025/1/16</a:t>
+              <a:t>2025/1/17</a:t>
             </a:fld>
             <a:endParaRPr kumimoji="1" lang="ja-JP" altLang="en-US"/>
           </a:p>
@@ -2297,7 +2297,7 @@
           <a:p>
             <a:fld id="{E9CC885B-4903-4D54-9A93-00025F12DED9}" type="datetimeFigureOut">
               <a:rPr kumimoji="1" lang="ja-JP" altLang="en-US" smtClean="0"/>
-              <a:t>2025/1/16</a:t>
+              <a:t>2025/1/17</a:t>
             </a:fld>
             <a:endParaRPr kumimoji="1" lang="ja-JP" altLang="en-US"/>
           </a:p>
@@ -2640,7 +2640,7 @@
           <a:p>
             <a:fld id="{E9CC885B-4903-4D54-9A93-00025F12DED9}" type="datetimeFigureOut">
               <a:rPr kumimoji="1" lang="ja-JP" altLang="en-US" smtClean="0"/>
-              <a:t>2025/1/16</a:t>
+              <a:t>2025/1/17</a:t>
             </a:fld>
             <a:endParaRPr kumimoji="1" lang="ja-JP" altLang="en-US"/>
           </a:p>
@@ -2928,7 +2928,7 @@
           <a:p>
             <a:fld id="{E9CC885B-4903-4D54-9A93-00025F12DED9}" type="datetimeFigureOut">
               <a:rPr kumimoji="1" lang="ja-JP" altLang="en-US" smtClean="0"/>
-              <a:t>2025/1/16</a:t>
+              <a:t>2025/1/17</a:t>
             </a:fld>
             <a:endParaRPr kumimoji="1" lang="ja-JP" altLang="en-US"/>
           </a:p>
@@ -3201,7 +3201,7 @@
           <a:p>
             <a:fld id="{E9CC885B-4903-4D54-9A93-00025F12DED9}" type="datetimeFigureOut">
               <a:rPr kumimoji="1" lang="ja-JP" altLang="en-US" smtClean="0"/>
-              <a:t>2025/1/16</a:t>
+              <a:t>2025/1/17</a:t>
             </a:fld>
             <a:endParaRPr kumimoji="1" lang="ja-JP" altLang="en-US"/>
           </a:p>
@@ -4053,11 +4053,19 @@
           </a:p>
           <a:p>
             <a:r>
-              <a:rPr lang="ja-JP" altLang="en-US" sz="2400" dirty="0"/>
+              <a:rPr lang="ja-JP" altLang="en-US" sz="2400" b="1" dirty="0">
+                <a:solidFill>
+                  <a:srgbClr val="00B050"/>
+                </a:solidFill>
+              </a:rPr>
               <a:t>タスク</a:t>
             </a:r>
             <a:r>
-              <a:rPr lang="en-US" altLang="ja-JP" sz="2400" dirty="0"/>
+              <a:rPr lang="en-US" altLang="ja-JP" sz="2400" b="1" dirty="0">
+                <a:solidFill>
+                  <a:srgbClr val="00B050"/>
+                </a:solidFill>
+              </a:rPr>
               <a:t>1</a:t>
             </a:r>
             <a:r>
@@ -4124,11 +4132,19 @@
           </a:p>
           <a:p>
             <a:r>
-              <a:rPr lang="ja-JP" altLang="en-US" sz="2400" dirty="0"/>
+              <a:rPr lang="ja-JP" altLang="en-US" sz="2400" b="1" dirty="0">
+                <a:solidFill>
+                  <a:srgbClr val="00B050"/>
+                </a:solidFill>
+              </a:rPr>
               <a:t>タスク</a:t>
             </a:r>
             <a:r>
-              <a:rPr lang="en-US" altLang="ja-JP" sz="2400" dirty="0"/>
+              <a:rPr lang="en-US" altLang="ja-JP" sz="2400" b="1" dirty="0">
+                <a:solidFill>
+                  <a:srgbClr val="00B050"/>
+                </a:solidFill>
+              </a:rPr>
               <a:t>2</a:t>
             </a:r>
             <a:r>
@@ -4314,11 +4330,19 @@
           </a:p>
           <a:p>
             <a:r>
-              <a:rPr lang="ja-JP" altLang="en-US" sz="2400" dirty="0"/>
+              <a:rPr lang="ja-JP" altLang="en-US" sz="2400" b="1" dirty="0">
+                <a:solidFill>
+                  <a:srgbClr val="00B050"/>
+                </a:solidFill>
+              </a:rPr>
               <a:t>タスク</a:t>
             </a:r>
             <a:r>
-              <a:rPr lang="en-US" altLang="ja-JP" sz="2400" dirty="0"/>
+              <a:rPr lang="en-US" altLang="ja-JP" sz="2400" b="1" dirty="0">
+                <a:solidFill>
+                  <a:srgbClr val="00B050"/>
+                </a:solidFill>
+              </a:rPr>
               <a:t>3</a:t>
             </a:r>
             <a:r>
@@ -4515,15 +4539,27 @@
           </a:p>
           <a:p>
             <a:r>
-              <a:rPr lang="en-US" altLang="ja-JP" sz="2400" dirty="0"/>
+              <a:rPr lang="en-US" altLang="ja-JP" sz="2400" b="1" dirty="0">
+                <a:solidFill>
+                  <a:srgbClr val="00B050"/>
+                </a:solidFill>
+              </a:rPr>
               <a:t>EX</a:t>
             </a:r>
             <a:r>
-              <a:rPr lang="ja-JP" altLang="en-US" sz="2400" dirty="0"/>
+              <a:rPr lang="ja-JP" altLang="en-US" sz="2400" b="1" dirty="0">
+                <a:solidFill>
+                  <a:srgbClr val="00B050"/>
+                </a:solidFill>
+              </a:rPr>
               <a:t>タスク</a:t>
             </a:r>
             <a:r>
-              <a:rPr lang="en-US" altLang="ja-JP" sz="2400" dirty="0"/>
+              <a:rPr lang="en-US" altLang="ja-JP" sz="2400" b="1" dirty="0">
+                <a:solidFill>
+                  <a:srgbClr val="00B050"/>
+                </a:solidFill>
+              </a:rPr>
               <a:t>1</a:t>
             </a:r>
             <a:r>
@@ -4581,15 +4617,27 @@
           </a:p>
           <a:p>
             <a:r>
-              <a:rPr lang="en-US" altLang="ja-JP" sz="2400" dirty="0"/>
+              <a:rPr lang="en-US" altLang="ja-JP" sz="2400" b="1" dirty="0">
+                <a:solidFill>
+                  <a:srgbClr val="00B050"/>
+                </a:solidFill>
+              </a:rPr>
               <a:t>EX</a:t>
             </a:r>
             <a:r>
-              <a:rPr lang="ja-JP" altLang="en-US" sz="2400" dirty="0"/>
+              <a:rPr lang="ja-JP" altLang="en-US" sz="2400" b="1" dirty="0">
+                <a:solidFill>
+                  <a:srgbClr val="00B050"/>
+                </a:solidFill>
+              </a:rPr>
               <a:t>タスク</a:t>
             </a:r>
             <a:r>
-              <a:rPr lang="en-US" altLang="ja-JP" sz="2400" dirty="0"/>
+              <a:rPr lang="en-US" altLang="ja-JP" sz="2400" b="1" dirty="0">
+                <a:solidFill>
+                  <a:srgbClr val="00B050"/>
+                </a:solidFill>
+              </a:rPr>
               <a:t>2</a:t>
             </a:r>
             <a:r>

--- a/ゲーム科2年/00_前期/ゲームエンジンⅢ/バージョン管理/09_ここまでの課題.pptx
+++ b/ゲーム科2年/00_前期/ゲームエンジンⅢ/バージョン管理/09_ここまでの課題.pptx
@@ -263,7 +263,7 @@
           <a:p>
             <a:fld id="{E9CC885B-4903-4D54-9A93-00025F12DED9}" type="datetimeFigureOut">
               <a:rPr kumimoji="1" lang="ja-JP" altLang="en-US" smtClean="0"/>
-              <a:t>2025/1/17</a:t>
+              <a:t>2025/1/27</a:t>
             </a:fld>
             <a:endParaRPr kumimoji="1" lang="ja-JP" altLang="en-US"/>
           </a:p>
@@ -493,7 +493,7 @@
           <a:p>
             <a:fld id="{E9CC885B-4903-4D54-9A93-00025F12DED9}" type="datetimeFigureOut">
               <a:rPr kumimoji="1" lang="ja-JP" altLang="en-US" smtClean="0"/>
-              <a:t>2025/1/17</a:t>
+              <a:t>2025/1/27</a:t>
             </a:fld>
             <a:endParaRPr kumimoji="1" lang="ja-JP" altLang="en-US"/>
           </a:p>
@@ -733,7 +733,7 @@
           <a:p>
             <a:fld id="{E9CC885B-4903-4D54-9A93-00025F12DED9}" type="datetimeFigureOut">
               <a:rPr kumimoji="1" lang="ja-JP" altLang="en-US" smtClean="0"/>
-              <a:t>2025/1/17</a:t>
+              <a:t>2025/1/27</a:t>
             </a:fld>
             <a:endParaRPr kumimoji="1" lang="ja-JP" altLang="en-US"/>
           </a:p>
@@ -963,7 +963,7 @@
           <a:p>
             <a:fld id="{E9CC885B-4903-4D54-9A93-00025F12DED9}" type="datetimeFigureOut">
               <a:rPr kumimoji="1" lang="ja-JP" altLang="en-US" smtClean="0"/>
-              <a:t>2025/1/17</a:t>
+              <a:t>2025/1/27</a:t>
             </a:fld>
             <a:endParaRPr kumimoji="1" lang="ja-JP" altLang="en-US"/>
           </a:p>
@@ -1238,7 +1238,7 @@
           <a:p>
             <a:fld id="{E9CC885B-4903-4D54-9A93-00025F12DED9}" type="datetimeFigureOut">
               <a:rPr kumimoji="1" lang="ja-JP" altLang="en-US" smtClean="0"/>
-              <a:t>2025/1/17</a:t>
+              <a:t>2025/1/27</a:t>
             </a:fld>
             <a:endParaRPr kumimoji="1" lang="ja-JP" altLang="en-US"/>
           </a:p>
@@ -1567,7 +1567,7 @@
           <a:p>
             <a:fld id="{E9CC885B-4903-4D54-9A93-00025F12DED9}" type="datetimeFigureOut">
               <a:rPr kumimoji="1" lang="ja-JP" altLang="en-US" smtClean="0"/>
-              <a:t>2025/1/17</a:t>
+              <a:t>2025/1/27</a:t>
             </a:fld>
             <a:endParaRPr kumimoji="1" lang="ja-JP" altLang="en-US"/>
           </a:p>
@@ -2043,7 +2043,7 @@
           <a:p>
             <a:fld id="{E9CC885B-4903-4D54-9A93-00025F12DED9}" type="datetimeFigureOut">
               <a:rPr kumimoji="1" lang="ja-JP" altLang="en-US" smtClean="0"/>
-              <a:t>2025/1/17</a:t>
+              <a:t>2025/1/27</a:t>
             </a:fld>
             <a:endParaRPr kumimoji="1" lang="ja-JP" altLang="en-US"/>
           </a:p>
@@ -2184,7 +2184,7 @@
           <a:p>
             <a:fld id="{E9CC885B-4903-4D54-9A93-00025F12DED9}" type="datetimeFigureOut">
               <a:rPr kumimoji="1" lang="ja-JP" altLang="en-US" smtClean="0"/>
-              <a:t>2025/1/17</a:t>
+              <a:t>2025/1/27</a:t>
             </a:fld>
             <a:endParaRPr kumimoji="1" lang="ja-JP" altLang="en-US"/>
           </a:p>
@@ -2297,7 +2297,7 @@
           <a:p>
             <a:fld id="{E9CC885B-4903-4D54-9A93-00025F12DED9}" type="datetimeFigureOut">
               <a:rPr kumimoji="1" lang="ja-JP" altLang="en-US" smtClean="0"/>
-              <a:t>2025/1/17</a:t>
+              <a:t>2025/1/27</a:t>
             </a:fld>
             <a:endParaRPr kumimoji="1" lang="ja-JP" altLang="en-US"/>
           </a:p>
@@ -2640,7 +2640,7 @@
           <a:p>
             <a:fld id="{E9CC885B-4903-4D54-9A93-00025F12DED9}" type="datetimeFigureOut">
               <a:rPr kumimoji="1" lang="ja-JP" altLang="en-US" smtClean="0"/>
-              <a:t>2025/1/17</a:t>
+              <a:t>2025/1/27</a:t>
             </a:fld>
             <a:endParaRPr kumimoji="1" lang="ja-JP" altLang="en-US"/>
           </a:p>
@@ -2928,7 +2928,7 @@
           <a:p>
             <a:fld id="{E9CC885B-4903-4D54-9A93-00025F12DED9}" type="datetimeFigureOut">
               <a:rPr kumimoji="1" lang="ja-JP" altLang="en-US" smtClean="0"/>
-              <a:t>2025/1/17</a:t>
+              <a:t>2025/1/27</a:t>
             </a:fld>
             <a:endParaRPr kumimoji="1" lang="ja-JP" altLang="en-US"/>
           </a:p>
@@ -3201,7 +3201,7 @@
           <a:p>
             <a:fld id="{E9CC885B-4903-4D54-9A93-00025F12DED9}" type="datetimeFigureOut">
               <a:rPr kumimoji="1" lang="ja-JP" altLang="en-US" smtClean="0"/>
-              <a:t>2025/1/17</a:t>
+              <a:t>2025/1/27</a:t>
             </a:fld>
             <a:endParaRPr kumimoji="1" lang="ja-JP" altLang="en-US"/>
           </a:p>
@@ -3858,31 +3858,7 @@
                   <a:srgbClr val="FF0000"/>
                 </a:solidFill>
               </a:rPr>
-              <a:t>しないと</a:t>
-            </a:r>
-            <a:r>
-              <a:rPr lang="en-US" altLang="ja-JP" sz="2400" b="1" dirty="0">
-                <a:solidFill>
-                  <a:srgbClr val="FF0000"/>
-                </a:solidFill>
-              </a:rPr>
-              <a:t>.</a:t>
-            </a:r>
-            <a:r>
-              <a:rPr lang="en-US" altLang="ja-JP" sz="2400" b="1" dirty="0" err="1">
-                <a:solidFill>
-                  <a:srgbClr val="FF0000"/>
-                </a:solidFill>
-              </a:rPr>
-              <a:t>gitignore</a:t>
-            </a:r>
-            <a:r>
-              <a:rPr lang="ja-JP" altLang="en-US" sz="2400" b="1" dirty="0">
-                <a:solidFill>
-                  <a:srgbClr val="FF0000"/>
-                </a:solidFill>
-              </a:rPr>
-              <a:t>対象のファイルまで</a:t>
+              <a:t>しないと除外対象のファイルまで</a:t>
             </a:r>
             <a:r>
               <a:rPr lang="en-US" altLang="ja-JP" sz="2400" b="1" dirty="0">

--- a/ゲーム科2年/00_前期/ゲームエンジンⅢ/バージョン管理/09_ここまでの課題.pptx
+++ b/ゲーム科2年/00_前期/ゲームエンジンⅢ/バージョン管理/09_ここまでの課題.pptx
@@ -263,7 +263,7 @@
           <a:p>
             <a:fld id="{E9CC885B-4903-4D54-9A93-00025F12DED9}" type="datetimeFigureOut">
               <a:rPr kumimoji="1" lang="ja-JP" altLang="en-US" smtClean="0"/>
-              <a:t>2025/1/27</a:t>
+              <a:t>2025/1/17</a:t>
             </a:fld>
             <a:endParaRPr kumimoji="1" lang="ja-JP" altLang="en-US"/>
           </a:p>
@@ -493,7 +493,7 @@
           <a:p>
             <a:fld id="{E9CC885B-4903-4D54-9A93-00025F12DED9}" type="datetimeFigureOut">
               <a:rPr kumimoji="1" lang="ja-JP" altLang="en-US" smtClean="0"/>
-              <a:t>2025/1/27</a:t>
+              <a:t>2025/1/17</a:t>
             </a:fld>
             <a:endParaRPr kumimoji="1" lang="ja-JP" altLang="en-US"/>
           </a:p>
@@ -733,7 +733,7 @@
           <a:p>
             <a:fld id="{E9CC885B-4903-4D54-9A93-00025F12DED9}" type="datetimeFigureOut">
               <a:rPr kumimoji="1" lang="ja-JP" altLang="en-US" smtClean="0"/>
-              <a:t>2025/1/27</a:t>
+              <a:t>2025/1/17</a:t>
             </a:fld>
             <a:endParaRPr kumimoji="1" lang="ja-JP" altLang="en-US"/>
           </a:p>
@@ -963,7 +963,7 @@
           <a:p>
             <a:fld id="{E9CC885B-4903-4D54-9A93-00025F12DED9}" type="datetimeFigureOut">
               <a:rPr kumimoji="1" lang="ja-JP" altLang="en-US" smtClean="0"/>
-              <a:t>2025/1/27</a:t>
+              <a:t>2025/1/17</a:t>
             </a:fld>
             <a:endParaRPr kumimoji="1" lang="ja-JP" altLang="en-US"/>
           </a:p>
@@ -1238,7 +1238,7 @@
           <a:p>
             <a:fld id="{E9CC885B-4903-4D54-9A93-00025F12DED9}" type="datetimeFigureOut">
               <a:rPr kumimoji="1" lang="ja-JP" altLang="en-US" smtClean="0"/>
-              <a:t>2025/1/27</a:t>
+              <a:t>2025/1/17</a:t>
             </a:fld>
             <a:endParaRPr kumimoji="1" lang="ja-JP" altLang="en-US"/>
           </a:p>
@@ -1567,7 +1567,7 @@
           <a:p>
             <a:fld id="{E9CC885B-4903-4D54-9A93-00025F12DED9}" type="datetimeFigureOut">
               <a:rPr kumimoji="1" lang="ja-JP" altLang="en-US" smtClean="0"/>
-              <a:t>2025/1/27</a:t>
+              <a:t>2025/1/17</a:t>
             </a:fld>
             <a:endParaRPr kumimoji="1" lang="ja-JP" altLang="en-US"/>
           </a:p>
@@ -2043,7 +2043,7 @@
           <a:p>
             <a:fld id="{E9CC885B-4903-4D54-9A93-00025F12DED9}" type="datetimeFigureOut">
               <a:rPr kumimoji="1" lang="ja-JP" altLang="en-US" smtClean="0"/>
-              <a:t>2025/1/27</a:t>
+              <a:t>2025/1/17</a:t>
             </a:fld>
             <a:endParaRPr kumimoji="1" lang="ja-JP" altLang="en-US"/>
           </a:p>
@@ -2184,7 +2184,7 @@
           <a:p>
             <a:fld id="{E9CC885B-4903-4D54-9A93-00025F12DED9}" type="datetimeFigureOut">
               <a:rPr kumimoji="1" lang="ja-JP" altLang="en-US" smtClean="0"/>
-              <a:t>2025/1/27</a:t>
+              <a:t>2025/1/17</a:t>
             </a:fld>
             <a:endParaRPr kumimoji="1" lang="ja-JP" altLang="en-US"/>
           </a:p>
@@ -2297,7 +2297,7 @@
           <a:p>
             <a:fld id="{E9CC885B-4903-4D54-9A93-00025F12DED9}" type="datetimeFigureOut">
               <a:rPr kumimoji="1" lang="ja-JP" altLang="en-US" smtClean="0"/>
-              <a:t>2025/1/27</a:t>
+              <a:t>2025/1/17</a:t>
             </a:fld>
             <a:endParaRPr kumimoji="1" lang="ja-JP" altLang="en-US"/>
           </a:p>
@@ -2640,7 +2640,7 @@
           <a:p>
             <a:fld id="{E9CC885B-4903-4D54-9A93-00025F12DED9}" type="datetimeFigureOut">
               <a:rPr kumimoji="1" lang="ja-JP" altLang="en-US" smtClean="0"/>
-              <a:t>2025/1/27</a:t>
+              <a:t>2025/1/17</a:t>
             </a:fld>
             <a:endParaRPr kumimoji="1" lang="ja-JP" altLang="en-US"/>
           </a:p>
@@ -2928,7 +2928,7 @@
           <a:p>
             <a:fld id="{E9CC885B-4903-4D54-9A93-00025F12DED9}" type="datetimeFigureOut">
               <a:rPr kumimoji="1" lang="ja-JP" altLang="en-US" smtClean="0"/>
-              <a:t>2025/1/27</a:t>
+              <a:t>2025/1/17</a:t>
             </a:fld>
             <a:endParaRPr kumimoji="1" lang="ja-JP" altLang="en-US"/>
           </a:p>
@@ -3201,7 +3201,7 @@
           <a:p>
             <a:fld id="{E9CC885B-4903-4D54-9A93-00025F12DED9}" type="datetimeFigureOut">
               <a:rPr kumimoji="1" lang="ja-JP" altLang="en-US" smtClean="0"/>
-              <a:t>2025/1/27</a:t>
+              <a:t>2025/1/17</a:t>
             </a:fld>
             <a:endParaRPr kumimoji="1" lang="ja-JP" altLang="en-US"/>
           </a:p>
@@ -3858,7 +3858,31 @@
                   <a:srgbClr val="FF0000"/>
                 </a:solidFill>
               </a:rPr>
-              <a:t>しないと除外対象のファイルまで</a:t>
+              <a:t>しないと</a:t>
+            </a:r>
+            <a:r>
+              <a:rPr lang="en-US" altLang="ja-JP" sz="2400" b="1" dirty="0">
+                <a:solidFill>
+                  <a:srgbClr val="FF0000"/>
+                </a:solidFill>
+              </a:rPr>
+              <a:t>.</a:t>
+            </a:r>
+            <a:r>
+              <a:rPr lang="en-US" altLang="ja-JP" sz="2400" b="1" dirty="0" err="1">
+                <a:solidFill>
+                  <a:srgbClr val="FF0000"/>
+                </a:solidFill>
+              </a:rPr>
+              <a:t>gitignore</a:t>
+            </a:r>
+            <a:r>
+              <a:rPr lang="ja-JP" altLang="en-US" sz="2400" b="1" dirty="0">
+                <a:solidFill>
+                  <a:srgbClr val="FF0000"/>
+                </a:solidFill>
+              </a:rPr>
+              <a:t>対象のファイルまで</a:t>
             </a:r>
             <a:r>
               <a:rPr lang="en-US" altLang="ja-JP" sz="2400" b="1" dirty="0">

--- a/ゲーム科2年/00_前期/ゲームエンジンⅢ/バージョン管理/09_ここまでの課題.pptx
+++ b/ゲーム科2年/00_前期/ゲームエンジンⅢ/バージョン管理/09_ここまでの課題.pptx
@@ -263,7 +263,7 @@
           <a:p>
             <a:fld id="{E9CC885B-4903-4D54-9A93-00025F12DED9}" type="datetimeFigureOut">
               <a:rPr kumimoji="1" lang="ja-JP" altLang="en-US" smtClean="0"/>
-              <a:t>2025/1/17</a:t>
+              <a:t>2025/5/15</a:t>
             </a:fld>
             <a:endParaRPr kumimoji="1" lang="ja-JP" altLang="en-US"/>
           </a:p>
@@ -493,7 +493,7 @@
           <a:p>
             <a:fld id="{E9CC885B-4903-4D54-9A93-00025F12DED9}" type="datetimeFigureOut">
               <a:rPr kumimoji="1" lang="ja-JP" altLang="en-US" smtClean="0"/>
-              <a:t>2025/1/17</a:t>
+              <a:t>2025/5/15</a:t>
             </a:fld>
             <a:endParaRPr kumimoji="1" lang="ja-JP" altLang="en-US"/>
           </a:p>
@@ -733,7 +733,7 @@
           <a:p>
             <a:fld id="{E9CC885B-4903-4D54-9A93-00025F12DED9}" type="datetimeFigureOut">
               <a:rPr kumimoji="1" lang="ja-JP" altLang="en-US" smtClean="0"/>
-              <a:t>2025/1/17</a:t>
+              <a:t>2025/5/15</a:t>
             </a:fld>
             <a:endParaRPr kumimoji="1" lang="ja-JP" altLang="en-US"/>
           </a:p>
@@ -963,7 +963,7 @@
           <a:p>
             <a:fld id="{E9CC885B-4903-4D54-9A93-00025F12DED9}" type="datetimeFigureOut">
               <a:rPr kumimoji="1" lang="ja-JP" altLang="en-US" smtClean="0"/>
-              <a:t>2025/1/17</a:t>
+              <a:t>2025/5/15</a:t>
             </a:fld>
             <a:endParaRPr kumimoji="1" lang="ja-JP" altLang="en-US"/>
           </a:p>
@@ -1238,7 +1238,7 @@
           <a:p>
             <a:fld id="{E9CC885B-4903-4D54-9A93-00025F12DED9}" type="datetimeFigureOut">
               <a:rPr kumimoji="1" lang="ja-JP" altLang="en-US" smtClean="0"/>
-              <a:t>2025/1/17</a:t>
+              <a:t>2025/5/15</a:t>
             </a:fld>
             <a:endParaRPr kumimoji="1" lang="ja-JP" altLang="en-US"/>
           </a:p>
@@ -1567,7 +1567,7 @@
           <a:p>
             <a:fld id="{E9CC885B-4903-4D54-9A93-00025F12DED9}" type="datetimeFigureOut">
               <a:rPr kumimoji="1" lang="ja-JP" altLang="en-US" smtClean="0"/>
-              <a:t>2025/1/17</a:t>
+              <a:t>2025/5/15</a:t>
             </a:fld>
             <a:endParaRPr kumimoji="1" lang="ja-JP" altLang="en-US"/>
           </a:p>
@@ -2043,7 +2043,7 @@
           <a:p>
             <a:fld id="{E9CC885B-4903-4D54-9A93-00025F12DED9}" type="datetimeFigureOut">
               <a:rPr kumimoji="1" lang="ja-JP" altLang="en-US" smtClean="0"/>
-              <a:t>2025/1/17</a:t>
+              <a:t>2025/5/15</a:t>
             </a:fld>
             <a:endParaRPr kumimoji="1" lang="ja-JP" altLang="en-US"/>
           </a:p>
@@ -2184,7 +2184,7 @@
           <a:p>
             <a:fld id="{E9CC885B-4903-4D54-9A93-00025F12DED9}" type="datetimeFigureOut">
               <a:rPr kumimoji="1" lang="ja-JP" altLang="en-US" smtClean="0"/>
-              <a:t>2025/1/17</a:t>
+              <a:t>2025/5/15</a:t>
             </a:fld>
             <a:endParaRPr kumimoji="1" lang="ja-JP" altLang="en-US"/>
           </a:p>
@@ -2297,7 +2297,7 @@
           <a:p>
             <a:fld id="{E9CC885B-4903-4D54-9A93-00025F12DED9}" type="datetimeFigureOut">
               <a:rPr kumimoji="1" lang="ja-JP" altLang="en-US" smtClean="0"/>
-              <a:t>2025/1/17</a:t>
+              <a:t>2025/5/15</a:t>
             </a:fld>
             <a:endParaRPr kumimoji="1" lang="ja-JP" altLang="en-US"/>
           </a:p>
@@ -2640,7 +2640,7 @@
           <a:p>
             <a:fld id="{E9CC885B-4903-4D54-9A93-00025F12DED9}" type="datetimeFigureOut">
               <a:rPr kumimoji="1" lang="ja-JP" altLang="en-US" smtClean="0"/>
-              <a:t>2025/1/17</a:t>
+              <a:t>2025/5/15</a:t>
             </a:fld>
             <a:endParaRPr kumimoji="1" lang="ja-JP" altLang="en-US"/>
           </a:p>
@@ -2928,7 +2928,7 @@
           <a:p>
             <a:fld id="{E9CC885B-4903-4D54-9A93-00025F12DED9}" type="datetimeFigureOut">
               <a:rPr kumimoji="1" lang="ja-JP" altLang="en-US" smtClean="0"/>
-              <a:t>2025/1/17</a:t>
+              <a:t>2025/5/15</a:t>
             </a:fld>
             <a:endParaRPr kumimoji="1" lang="ja-JP" altLang="en-US"/>
           </a:p>
@@ -3201,7 +3201,7 @@
           <a:p>
             <a:fld id="{E9CC885B-4903-4D54-9A93-00025F12DED9}" type="datetimeFigureOut">
               <a:rPr kumimoji="1" lang="ja-JP" altLang="en-US" smtClean="0"/>
-              <a:t>2025/1/17</a:t>
+              <a:t>2025/5/15</a:t>
             </a:fld>
             <a:endParaRPr kumimoji="1" lang="ja-JP" altLang="en-US"/>
           </a:p>
@@ -4287,7 +4287,7 @@
         <p:spPr>
           <a:xfrm>
             <a:off x="567542" y="1216429"/>
-            <a:ext cx="8494633" cy="3785652"/>
+            <a:ext cx="8494633" cy="4154984"/>
           </a:xfrm>
           <a:prstGeom prst="rect">
             <a:avLst/>
@@ -4422,6 +4422,29 @@
                 </a:solidFill>
               </a:rPr>
               <a:t>スライドに書いていない作業は誰が担当しても良いです。</a:t>
+            </a:r>
+            <a:endParaRPr lang="en-US" altLang="ja-JP" sz="2400" b="1" dirty="0">
+              <a:solidFill>
+                <a:srgbClr val="FF0000"/>
+              </a:solidFill>
+            </a:endParaRPr>
+          </a:p>
+          <a:p>
+            <a:r>
+              <a:rPr lang="en-US" altLang="ja-JP" sz="2400" b="1" dirty="0">
+                <a:solidFill>
+                  <a:srgbClr val="FF0000"/>
+                </a:solidFill>
+              </a:rPr>
+              <a:t>※</a:t>
+            </a:r>
+            <a:r>
+              <a:rPr lang="ja-JP" altLang="en-US" sz="2400" b="1" dirty="0">
+                <a:solidFill>
+                  <a:srgbClr val="FF0000"/>
+                </a:solidFill>
+              </a:rPr>
+              <a:t>４人以上のチームは次ページ以降のものも実装しましょう</a:t>
             </a:r>
             <a:endParaRPr lang="en-US" altLang="ja-JP" sz="2400" b="1" dirty="0">
               <a:solidFill>
